--- a/slides/0_introduction.pptx
+++ b/slides/0_introduction.pptx
@@ -485,7 +485,7 @@
           <a:p>
             <a:fld id="{506E0FD1-891F-4B1E-916D-E9B585160BB8}" type="datetimeFigureOut">
               <a:rPr lang="en-GB" smtClean="0"/>
-              <a:t>05/03/2026</a:t>
+              <a:t>22/04/2026</a:t>
             </a:fld>
             <a:endParaRPr lang="en-GB"/>
           </a:p>
@@ -902,7 +902,7 @@
           <a:p>
             <a:fld id="{D68C3F22-27B2-44E3-9C5F-D08126455F6F}" type="datetime1">
               <a:rPr lang="en-GB" smtClean="0"/>
-              <a:t>05/03/2026</a:t>
+              <a:t>22/04/2026</a:t>
             </a:fld>
             <a:endParaRPr lang="en-GB"/>
           </a:p>
@@ -1102,7 +1102,7 @@
           <a:p>
             <a:fld id="{1CD03846-7BF6-4FB6-A921-FF3379ADBD4C}" type="datetime1">
               <a:rPr lang="en-GB" smtClean="0"/>
-              <a:t>05/03/2026</a:t>
+              <a:t>22/04/2026</a:t>
             </a:fld>
             <a:endParaRPr lang="en-GB"/>
           </a:p>
@@ -1312,7 +1312,7 @@
           <a:p>
             <a:fld id="{99E1B91A-3FD0-4144-9C84-63E9688ED2FE}" type="datetime1">
               <a:rPr lang="en-GB" smtClean="0"/>
-              <a:t>05/03/2026</a:t>
+              <a:t>22/04/2026</a:t>
             </a:fld>
             <a:endParaRPr lang="en-GB"/>
           </a:p>
@@ -1512,7 +1512,7 @@
           <a:p>
             <a:fld id="{5295ED7B-FEAD-4734-819F-93EF4B0EA908}" type="datetime1">
               <a:rPr lang="en-GB" smtClean="0"/>
-              <a:t>05/03/2026</a:t>
+              <a:t>22/04/2026</a:t>
             </a:fld>
             <a:endParaRPr lang="en-GB"/>
           </a:p>
@@ -1788,7 +1788,7 @@
           <a:p>
             <a:fld id="{D2D5D4B4-C926-4B45-8815-1ED8911179A2}" type="datetime1">
               <a:rPr lang="en-GB" smtClean="0"/>
-              <a:t>05/03/2026</a:t>
+              <a:t>22/04/2026</a:t>
             </a:fld>
             <a:endParaRPr lang="en-GB"/>
           </a:p>
@@ -2056,7 +2056,7 @@
           <a:p>
             <a:fld id="{B4C5210A-0E37-4935-93AF-69F21A5F712F}" type="datetime1">
               <a:rPr lang="en-GB" smtClean="0"/>
-              <a:t>05/03/2026</a:t>
+              <a:t>22/04/2026</a:t>
             </a:fld>
             <a:endParaRPr lang="en-GB"/>
           </a:p>
@@ -2471,7 +2471,7 @@
           <a:p>
             <a:fld id="{3D3A6B2F-436C-4691-80E8-9C890E000E9D}" type="datetime1">
               <a:rPr lang="en-GB" smtClean="0"/>
-              <a:t>05/03/2026</a:t>
+              <a:t>22/04/2026</a:t>
             </a:fld>
             <a:endParaRPr lang="en-GB"/>
           </a:p>
@@ -2613,7 +2613,7 @@
           <a:p>
             <a:fld id="{84385F4C-D74B-496F-8D21-97E3549C783B}" type="datetime1">
               <a:rPr lang="en-GB" smtClean="0"/>
-              <a:t>05/03/2026</a:t>
+              <a:t>22/04/2026</a:t>
             </a:fld>
             <a:endParaRPr lang="en-GB"/>
           </a:p>
@@ -2726,7 +2726,7 @@
           <a:p>
             <a:fld id="{0CBDCB32-C241-4703-A832-4EB47BD54E83}" type="datetime1">
               <a:rPr lang="en-GB" smtClean="0"/>
-              <a:t>05/03/2026</a:t>
+              <a:t>22/04/2026</a:t>
             </a:fld>
             <a:endParaRPr lang="en-GB"/>
           </a:p>
@@ -3039,7 +3039,7 @@
           <a:p>
             <a:fld id="{85C150FF-BE95-4D25-A16A-E368A81CBF24}" type="datetime1">
               <a:rPr lang="en-GB" smtClean="0"/>
-              <a:t>05/03/2026</a:t>
+              <a:t>22/04/2026</a:t>
             </a:fld>
             <a:endParaRPr lang="en-GB"/>
           </a:p>
@@ -3328,7 +3328,7 @@
           <a:p>
             <a:fld id="{F3C5DB4B-B349-43C9-A424-BADA723AD9F1}" type="datetime1">
               <a:rPr lang="en-GB" smtClean="0"/>
-              <a:t>05/03/2026</a:t>
+              <a:t>22/04/2026</a:t>
             </a:fld>
             <a:endParaRPr lang="en-GB"/>
           </a:p>
@@ -3571,7 +3571,7 @@
           <a:p>
             <a:fld id="{12632426-0A0C-405F-A3D0-2D11AA44702A}" type="datetime1">
               <a:rPr lang="en-GB" smtClean="0"/>
-              <a:t>05/03/2026</a:t>
+              <a:t>22/04/2026</a:t>
             </a:fld>
             <a:endParaRPr lang="en-GB"/>
           </a:p>
@@ -6541,7 +6541,7 @@
         </p:spPr>
         <p:txBody>
           <a:bodyPr>
-            <a:normAutofit fontScale="92500" lnSpcReduction="10000"/>
+            <a:normAutofit/>
           </a:bodyPr>
           <a:lstStyle/>
           <a:p>
@@ -6551,570 +6551,15 @@
             </a:pPr>
             <a:r>
               <a:rPr lang="de-DE" dirty="0"/>
-              <a:t>Foundations</a:t>
-            </a:r>
-          </a:p>
-          <a:p>
-            <a:pPr lvl="1"/>
-            <a:r>
-              <a:rPr lang="de-DE" sz="1500" dirty="0"/>
-              <a:t>Motivation: </a:t>
-            </a:r>
-            <a:r>
-              <a:rPr lang="de-DE" sz="1500" dirty="0" err="1"/>
-              <a:t>control</a:t>
-            </a:r>
-            <a:r>
-              <a:rPr lang="de-DE" sz="1500" dirty="0"/>
-              <a:t> </a:t>
-            </a:r>
-            <a:r>
-              <a:rPr lang="de-DE" sz="1500" dirty="0" err="1"/>
-              <a:t>theory</a:t>
-            </a:r>
-            <a:r>
-              <a:rPr lang="de-DE" sz="1500" dirty="0"/>
-              <a:t> </a:t>
-            </a:r>
-            <a:r>
-              <a:rPr lang="de-DE" sz="1500" dirty="0" err="1"/>
-              <a:t>refresher</a:t>
-            </a:r>
-            <a:r>
-              <a:rPr lang="de-DE" sz="1500" dirty="0"/>
-              <a:t>, Model </a:t>
-            </a:r>
-            <a:r>
-              <a:rPr lang="de-DE" sz="1500" dirty="0" err="1"/>
-              <a:t>Predictive</a:t>
-            </a:r>
-            <a:r>
-              <a:rPr lang="de-DE" sz="1500" dirty="0"/>
-              <a:t> Control, </a:t>
-            </a:r>
-            <a:r>
-              <a:rPr lang="de-DE" sz="1500" dirty="0" err="1"/>
-              <a:t>control</a:t>
-            </a:r>
-            <a:r>
-              <a:rPr lang="de-DE" sz="1500" dirty="0"/>
-              <a:t> </a:t>
-            </a:r>
-            <a:r>
-              <a:rPr lang="de-DE" sz="1500" dirty="0" err="1"/>
-              <a:t>vs</a:t>
-            </a:r>
-            <a:r>
-              <a:rPr lang="de-DE" sz="1500" dirty="0"/>
-              <a:t> </a:t>
-            </a:r>
-            <a:r>
-              <a:rPr lang="de-DE" sz="1500" dirty="0" err="1"/>
-              <a:t>learning</a:t>
-            </a:r>
-            <a:endParaRPr lang="de-DE" sz="1500" dirty="0"/>
-          </a:p>
-          <a:p>
-            <a:pPr lvl="1"/>
-            <a:r>
-              <a:rPr lang="de-DE" sz="1500" dirty="0" err="1"/>
-              <a:t>Mathematical</a:t>
-            </a:r>
-            <a:r>
-              <a:rPr lang="de-DE" sz="1500" dirty="0"/>
-              <a:t> Setup: Markov </a:t>
-            </a:r>
-            <a:r>
-              <a:rPr lang="de-DE" sz="1500" dirty="0" err="1"/>
-              <a:t>Decision</a:t>
-            </a:r>
-            <a:r>
-              <a:rPr lang="de-DE" sz="1500" dirty="0"/>
-              <a:t> </a:t>
-            </a:r>
-            <a:r>
-              <a:rPr lang="de-DE" sz="1500" dirty="0" err="1"/>
-              <a:t>Processes</a:t>
-            </a:r>
-            <a:r>
-              <a:rPr lang="de-DE" sz="1500" dirty="0"/>
-              <a:t>, </a:t>
-            </a:r>
-            <a:r>
-              <a:rPr lang="de-DE" sz="1500" dirty="0" err="1"/>
-              <a:t>rewards</a:t>
-            </a:r>
-            <a:r>
-              <a:rPr lang="de-DE" sz="1500" dirty="0"/>
-              <a:t>, </a:t>
-            </a:r>
-            <a:r>
-              <a:rPr lang="de-DE" sz="1500" dirty="0" err="1"/>
-              <a:t>policies</a:t>
-            </a:r>
-            <a:r>
-              <a:rPr lang="de-DE" sz="1500" dirty="0"/>
-              <a:t>, </a:t>
-            </a:r>
-            <a:r>
-              <a:rPr lang="de-DE" sz="1500" dirty="0" err="1"/>
-              <a:t>state-value</a:t>
-            </a:r>
-            <a:r>
-              <a:rPr lang="de-DE" sz="1500" dirty="0"/>
-              <a:t> &amp; action-</a:t>
-            </a:r>
-            <a:r>
-              <a:rPr lang="de-DE" sz="1500" dirty="0" err="1"/>
-              <a:t>value</a:t>
-            </a:r>
-            <a:r>
-              <a:rPr lang="de-DE" sz="1500" dirty="0"/>
-              <a:t> </a:t>
-            </a:r>
-            <a:r>
-              <a:rPr lang="de-DE" sz="1500" dirty="0" err="1"/>
-              <a:t>functions</a:t>
-            </a:r>
-            <a:r>
-              <a:rPr lang="de-DE" sz="1500" dirty="0"/>
-              <a:t>, </a:t>
-            </a:r>
-            <a:r>
-              <a:rPr lang="de-DE" sz="1500" dirty="0" err="1"/>
-              <a:t>Bellman</a:t>
-            </a:r>
-            <a:r>
-              <a:rPr lang="de-DE" sz="1500" dirty="0"/>
-              <a:t> </a:t>
-            </a:r>
-            <a:r>
-              <a:rPr lang="de-DE" sz="1500" dirty="0" err="1"/>
-              <a:t>equations</a:t>
-            </a:r>
-            <a:endParaRPr lang="de-DE" sz="1500" dirty="0"/>
-          </a:p>
-          <a:p>
-            <a:pPr lvl="1"/>
-            <a:r>
-              <a:rPr lang="de-DE" sz="1500" dirty="0" err="1"/>
-              <a:t>Planning</a:t>
-            </a:r>
-            <a:r>
-              <a:rPr lang="de-DE" sz="1500" dirty="0"/>
-              <a:t>: </a:t>
-            </a:r>
-            <a:r>
-              <a:rPr lang="de-DE" sz="1500" dirty="0" err="1"/>
-              <a:t>policy</a:t>
-            </a:r>
-            <a:r>
-              <a:rPr lang="de-DE" sz="1500" dirty="0"/>
-              <a:t> </a:t>
-            </a:r>
-            <a:r>
-              <a:rPr lang="de-DE" sz="1500" dirty="0" err="1"/>
-              <a:t>evaluation</a:t>
-            </a:r>
-            <a:r>
-              <a:rPr lang="de-DE" sz="1500" dirty="0"/>
-              <a:t> &amp; </a:t>
-            </a:r>
-            <a:r>
-              <a:rPr lang="de-DE" sz="1500" dirty="0" err="1"/>
-              <a:t>improvement</a:t>
-            </a:r>
-            <a:r>
-              <a:rPr lang="de-DE" sz="1500" dirty="0"/>
-              <a:t>, </a:t>
-            </a:r>
-            <a:r>
-              <a:rPr lang="de-DE" sz="1500" dirty="0" err="1"/>
-              <a:t>value</a:t>
-            </a:r>
-            <a:r>
-              <a:rPr lang="de-DE" sz="1500" dirty="0"/>
-              <a:t> </a:t>
-            </a:r>
-            <a:r>
-              <a:rPr lang="de-DE" sz="1500" dirty="0" err="1"/>
-              <a:t>iteration</a:t>
-            </a:r>
-            <a:r>
-              <a:rPr lang="de-DE" sz="1500" dirty="0"/>
-              <a:t>, </a:t>
-            </a:r>
-            <a:r>
-              <a:rPr lang="de-DE" sz="1500" dirty="0" err="1"/>
-              <a:t>policy</a:t>
-            </a:r>
-            <a:r>
-              <a:rPr lang="de-DE" sz="1500" dirty="0"/>
-              <a:t> </a:t>
-            </a:r>
-            <a:r>
-              <a:rPr lang="de-DE" sz="1500" dirty="0" err="1"/>
-              <a:t>iteration</a:t>
-            </a:r>
-            <a:r>
-              <a:rPr lang="de-DE" sz="1500" dirty="0"/>
-              <a:t>, </a:t>
-            </a:r>
-            <a:r>
-              <a:rPr lang="de-DE" sz="1500" dirty="0" err="1"/>
-              <a:t>dynamic</a:t>
-            </a:r>
-            <a:r>
-              <a:rPr lang="de-DE" sz="1500" dirty="0"/>
-              <a:t> </a:t>
-            </a:r>
-            <a:r>
-              <a:rPr lang="de-DE" sz="1500" dirty="0" err="1"/>
-              <a:t>programming</a:t>
-            </a:r>
-            <a:endParaRPr lang="de-DE" sz="1500" dirty="0"/>
-          </a:p>
-          <a:p>
-            <a:pPr lvl="1"/>
-            <a:r>
-              <a:rPr lang="de-DE" sz="1500" dirty="0"/>
-              <a:t>Model-Free Learning: Monte Carlo </a:t>
-            </a:r>
-            <a:r>
-              <a:rPr lang="de-DE" sz="1500" dirty="0" err="1"/>
-              <a:t>methods</a:t>
-            </a:r>
-            <a:r>
-              <a:rPr lang="de-DE" sz="1500" dirty="0"/>
-              <a:t>, Temporal-</a:t>
-            </a:r>
-            <a:r>
-              <a:rPr lang="de-DE" sz="1500" dirty="0" err="1"/>
-              <a:t>Difference</a:t>
-            </a:r>
-            <a:r>
-              <a:rPr lang="de-DE" sz="1500" dirty="0"/>
-              <a:t> </a:t>
-            </a:r>
-            <a:r>
-              <a:rPr lang="de-DE" sz="1500" dirty="0" err="1"/>
-              <a:t>learning</a:t>
-            </a:r>
-            <a:r>
-              <a:rPr lang="de-DE" sz="1500" dirty="0"/>
-              <a:t>, SARSA, Q-</a:t>
-            </a:r>
-            <a:r>
-              <a:rPr lang="de-DE" sz="1500" dirty="0" err="1"/>
-              <a:t>learning</a:t>
-            </a:r>
-            <a:endParaRPr lang="de-DE" sz="1500" dirty="0"/>
-          </a:p>
-          <a:p>
-            <a:pPr marL="457200" lvl="1" indent="0">
-              <a:buNone/>
-            </a:pPr>
-            <a:endParaRPr lang="de-DE" sz="1500" dirty="0"/>
+              <a:t>Motivation: Control vs. Learning</a:t>
+            </a:r>
           </a:p>
           <a:p>
             <a:pPr marL="514350" indent="-514350">
               <a:buFont typeface="+mj-lt"/>
               <a:buAutoNum type="arabicPeriod"/>
             </a:pPr>
-            <a:r>
-              <a:rPr lang="de-DE" dirty="0"/>
-              <a:t>Deep RL</a:t>
-            </a:r>
-          </a:p>
-          <a:p>
-            <a:pPr lvl="1"/>
-            <a:r>
-              <a:rPr lang="de-DE" sz="1500" dirty="0" err="1"/>
-              <a:t>Function</a:t>
-            </a:r>
-            <a:r>
-              <a:rPr lang="de-DE" sz="1500" dirty="0"/>
-              <a:t> Approximation: </a:t>
-            </a:r>
-            <a:r>
-              <a:rPr lang="de-DE" sz="1500" dirty="0" err="1"/>
-              <a:t>limitations</a:t>
-            </a:r>
-            <a:r>
-              <a:rPr lang="de-DE" sz="1500" dirty="0"/>
-              <a:t> </a:t>
-            </a:r>
-            <a:r>
-              <a:rPr lang="de-DE" sz="1500" dirty="0" err="1"/>
-              <a:t>of</a:t>
-            </a:r>
-            <a:r>
-              <a:rPr lang="de-DE" sz="1500" dirty="0"/>
-              <a:t> </a:t>
-            </a:r>
-            <a:r>
-              <a:rPr lang="de-DE" sz="1500" dirty="0" err="1"/>
-              <a:t>tabular</a:t>
-            </a:r>
-            <a:r>
-              <a:rPr lang="de-DE" sz="1500" dirty="0"/>
-              <a:t> </a:t>
-            </a:r>
-            <a:r>
-              <a:rPr lang="de-DE" sz="1500" dirty="0" err="1"/>
-              <a:t>methods</a:t>
-            </a:r>
-            <a:r>
-              <a:rPr lang="de-DE" sz="1500" dirty="0"/>
-              <a:t>, </a:t>
-            </a:r>
-            <a:r>
-              <a:rPr lang="de-DE" sz="1500" dirty="0" err="1"/>
-              <a:t>machine</a:t>
-            </a:r>
-            <a:r>
-              <a:rPr lang="de-DE" sz="1500" dirty="0"/>
-              <a:t> </a:t>
-            </a:r>
-            <a:r>
-              <a:rPr lang="de-DE" sz="1500" dirty="0" err="1"/>
-              <a:t>learning</a:t>
-            </a:r>
-            <a:r>
-              <a:rPr lang="de-DE" sz="1500" dirty="0"/>
-              <a:t>, </a:t>
-            </a:r>
-            <a:r>
-              <a:rPr lang="de-DE" sz="1500" dirty="0" err="1"/>
-              <a:t>deep</a:t>
-            </a:r>
-            <a:r>
-              <a:rPr lang="de-DE" sz="1500" dirty="0"/>
-              <a:t> </a:t>
-            </a:r>
-            <a:r>
-              <a:rPr lang="de-DE" sz="1500" dirty="0" err="1"/>
-              <a:t>learning</a:t>
-            </a:r>
-            <a:endParaRPr lang="de-DE" sz="1500" dirty="0"/>
-          </a:p>
-          <a:p>
-            <a:pPr lvl="1"/>
-            <a:r>
-              <a:rPr lang="de-DE" sz="1500" dirty="0"/>
-              <a:t>Value-</a:t>
-            </a:r>
-            <a:r>
-              <a:rPr lang="de-DE" sz="1500" dirty="0" err="1"/>
-              <a:t>Based</a:t>
-            </a:r>
-            <a:r>
-              <a:rPr lang="de-DE" sz="1500" dirty="0"/>
-              <a:t> Deep RL: Deep-Q Networks, </a:t>
-            </a:r>
-            <a:r>
-              <a:rPr lang="de-DE" sz="1500" dirty="0" err="1"/>
-              <a:t>replay</a:t>
-            </a:r>
-            <a:r>
-              <a:rPr lang="de-DE" sz="1500" dirty="0"/>
-              <a:t> </a:t>
-            </a:r>
-            <a:r>
-              <a:rPr lang="de-DE" sz="1500" dirty="0" err="1"/>
-              <a:t>buffers</a:t>
-            </a:r>
-            <a:r>
-              <a:rPr lang="de-DE" sz="1500" dirty="0"/>
-              <a:t>, </a:t>
-            </a:r>
-            <a:r>
-              <a:rPr lang="de-DE" sz="1500" dirty="0" err="1"/>
-              <a:t>target</a:t>
-            </a:r>
-            <a:r>
-              <a:rPr lang="de-DE" sz="1500" dirty="0"/>
-              <a:t> </a:t>
-            </a:r>
-            <a:r>
-              <a:rPr lang="de-DE" sz="1500" dirty="0" err="1"/>
-              <a:t>networks</a:t>
-            </a:r>
-            <a:r>
-              <a:rPr lang="de-DE" sz="1500" dirty="0"/>
-              <a:t>, </a:t>
-            </a:r>
-            <a:r>
-              <a:rPr lang="de-DE" sz="1500" dirty="0" err="1"/>
-              <a:t>distribution</a:t>
-            </a:r>
-            <a:r>
-              <a:rPr lang="de-DE" sz="1500" dirty="0"/>
-              <a:t> shift in RL, </a:t>
-            </a:r>
-            <a:r>
-              <a:rPr lang="de-DE" sz="1500" dirty="0" err="1"/>
-              <a:t>the</a:t>
-            </a:r>
-            <a:r>
-              <a:rPr lang="de-DE" sz="1500" dirty="0"/>
-              <a:t> </a:t>
-            </a:r>
-            <a:r>
-              <a:rPr lang="de-DE" sz="1500" dirty="0" err="1"/>
-              <a:t>deadly</a:t>
-            </a:r>
-            <a:r>
-              <a:rPr lang="de-DE" sz="1500" dirty="0"/>
-              <a:t> </a:t>
-            </a:r>
-            <a:r>
-              <a:rPr lang="de-DE" sz="1500" dirty="0" err="1"/>
-              <a:t>triad</a:t>
-            </a:r>
-            <a:r>
-              <a:rPr lang="de-DE" sz="1500" dirty="0"/>
-              <a:t>, </a:t>
-            </a:r>
-            <a:r>
-              <a:rPr lang="de-DE" sz="1500" dirty="0" err="1"/>
-              <a:t>stabilization</a:t>
-            </a:r>
-            <a:r>
-              <a:rPr lang="de-DE" sz="1500" dirty="0"/>
-              <a:t> </a:t>
-            </a:r>
-            <a:r>
-              <a:rPr lang="de-DE" sz="1500" dirty="0" err="1"/>
-              <a:t>principles</a:t>
-            </a:r>
-            <a:endParaRPr lang="de-DE" sz="1500" dirty="0"/>
-          </a:p>
-          <a:p>
-            <a:pPr lvl="1"/>
-            <a:r>
-              <a:rPr lang="de-DE" sz="1500" dirty="0"/>
-              <a:t>Policy Gradient Methods: </a:t>
-            </a:r>
-            <a:r>
-              <a:rPr lang="de-DE" sz="1500" dirty="0" err="1"/>
-              <a:t>direct</a:t>
-            </a:r>
-            <a:r>
-              <a:rPr lang="de-DE" sz="1500" dirty="0"/>
-              <a:t> </a:t>
-            </a:r>
-            <a:r>
-              <a:rPr lang="de-DE" sz="1500" dirty="0" err="1"/>
-              <a:t>policy</a:t>
-            </a:r>
-            <a:r>
-              <a:rPr lang="de-DE" sz="1500" dirty="0"/>
-              <a:t> </a:t>
-            </a:r>
-            <a:r>
-              <a:rPr lang="de-DE" sz="1500" dirty="0" err="1"/>
-              <a:t>search</a:t>
-            </a:r>
-            <a:r>
-              <a:rPr lang="de-DE" sz="1500" dirty="0"/>
-              <a:t>, </a:t>
-            </a:r>
-            <a:r>
-              <a:rPr lang="de-DE" sz="1500" dirty="0" err="1"/>
-              <a:t>policy</a:t>
-            </a:r>
-            <a:r>
-              <a:rPr lang="de-DE" sz="1500" dirty="0"/>
-              <a:t> </a:t>
-            </a:r>
-            <a:r>
-              <a:rPr lang="de-DE" sz="1500" dirty="0" err="1"/>
-              <a:t>gradient</a:t>
-            </a:r>
-            <a:r>
-              <a:rPr lang="de-DE" sz="1500" dirty="0"/>
-              <a:t> </a:t>
-            </a:r>
-            <a:r>
-              <a:rPr lang="de-DE" sz="1500" dirty="0" err="1"/>
-              <a:t>theorem</a:t>
-            </a:r>
-            <a:r>
-              <a:rPr lang="de-DE" sz="1500" dirty="0"/>
-              <a:t>, log-</a:t>
-            </a:r>
-            <a:r>
-              <a:rPr lang="de-DE" sz="1500" dirty="0" err="1"/>
-              <a:t>likelihood</a:t>
-            </a:r>
-            <a:r>
-              <a:rPr lang="de-DE" sz="1500" dirty="0"/>
-              <a:t> </a:t>
-            </a:r>
-            <a:r>
-              <a:rPr lang="de-DE" sz="1500" dirty="0" err="1"/>
-              <a:t>trick</a:t>
-            </a:r>
-            <a:r>
-              <a:rPr lang="de-DE" sz="1500" dirty="0"/>
-              <a:t>, REINFORCE, </a:t>
-            </a:r>
-            <a:r>
-              <a:rPr lang="de-DE" sz="1500" dirty="0" err="1"/>
-              <a:t>baselines</a:t>
-            </a:r>
-            <a:r>
-              <a:rPr lang="de-DE" sz="1500" dirty="0"/>
-              <a:t> &amp; </a:t>
-            </a:r>
-            <a:r>
-              <a:rPr lang="de-DE" sz="1500" dirty="0" err="1"/>
-              <a:t>variance</a:t>
-            </a:r>
-            <a:r>
-              <a:rPr lang="de-DE" sz="1500" dirty="0"/>
-              <a:t> </a:t>
-            </a:r>
-            <a:r>
-              <a:rPr lang="de-DE" sz="1500" dirty="0" err="1"/>
-              <a:t>reduction</a:t>
-            </a:r>
-            <a:endParaRPr lang="de-DE" sz="1500" dirty="0"/>
-          </a:p>
-          <a:p>
-            <a:pPr lvl="1"/>
-            <a:r>
-              <a:rPr lang="de-DE" sz="1500" dirty="0"/>
-              <a:t>Actor–</a:t>
-            </a:r>
-            <a:r>
-              <a:rPr lang="de-DE" sz="1500" dirty="0" err="1"/>
-              <a:t>Critic</a:t>
-            </a:r>
-            <a:r>
-              <a:rPr lang="de-DE" sz="1500" dirty="0"/>
-              <a:t> Methods: Proximal Policy </a:t>
-            </a:r>
-            <a:r>
-              <a:rPr lang="de-DE" sz="1500" dirty="0" err="1"/>
-              <a:t>Optimization</a:t>
-            </a:r>
-            <a:r>
-              <a:rPr lang="de-DE" sz="1500" dirty="0"/>
-              <a:t>, Soft Actor-</a:t>
-            </a:r>
-            <a:r>
-              <a:rPr lang="de-DE" sz="1500" dirty="0" err="1"/>
-              <a:t>Critic</a:t>
-            </a:r>
-            <a:endParaRPr lang="de-DE" sz="1500" dirty="0"/>
-          </a:p>
-          <a:p>
-            <a:pPr marL="457200" lvl="1" indent="0">
-              <a:buNone/>
-            </a:pPr>
-            <a:endParaRPr lang="de-DE" sz="1500" dirty="0"/>
+            <a:endParaRPr lang="de-DE" dirty="0"/>
           </a:p>
           <a:p>
             <a:pPr marL="514350" indent="-514350">
@@ -7122,6 +6567,83 @@
               <a:buAutoNum type="arabicPeriod"/>
             </a:pPr>
             <a:r>
+              <a:rPr lang="de-DE" dirty="0"/>
+              <a:t>Foundations: </a:t>
+            </a:r>
+            <a:r>
+              <a:rPr lang="de-DE" dirty="0" err="1"/>
+              <a:t>Tabular</a:t>
+            </a:r>
+            <a:r>
+              <a:rPr lang="de-DE" dirty="0"/>
+              <a:t> Methods</a:t>
+            </a:r>
+            <a:endParaRPr lang="de-DE" sz="1500" dirty="0"/>
+          </a:p>
+          <a:p>
+            <a:pPr marL="514350" indent="-514350">
+              <a:buFont typeface="+mj-lt"/>
+              <a:buAutoNum type="arabicPeriod"/>
+            </a:pPr>
+            <a:endParaRPr lang="de-DE" dirty="0"/>
+          </a:p>
+          <a:p>
+            <a:pPr marL="514350" indent="-514350">
+              <a:buFont typeface="+mj-lt"/>
+              <a:buAutoNum type="arabicPeriod"/>
+            </a:pPr>
+            <a:r>
+              <a:rPr lang="de-DE" dirty="0" err="1"/>
+              <a:t>Function</a:t>
+            </a:r>
+            <a:r>
+              <a:rPr lang="de-DE" dirty="0"/>
+              <a:t> Approximation: </a:t>
+            </a:r>
+            <a:r>
+              <a:rPr lang="de-DE" dirty="0" err="1"/>
+              <a:t>Supervised</a:t>
+            </a:r>
+            <a:r>
+              <a:rPr lang="de-DE" dirty="0"/>
+              <a:t> Learning</a:t>
+            </a:r>
+          </a:p>
+          <a:p>
+            <a:pPr marL="514350" indent="-514350">
+              <a:buFont typeface="+mj-lt"/>
+              <a:buAutoNum type="arabicPeriod"/>
+            </a:pPr>
+            <a:endParaRPr lang="de-DE" dirty="0"/>
+          </a:p>
+          <a:p>
+            <a:pPr marL="514350" indent="-514350">
+              <a:buFont typeface="+mj-lt"/>
+              <a:buAutoNum type="arabicPeriod"/>
+            </a:pPr>
+            <a:r>
+              <a:rPr lang="de-DE" dirty="0"/>
+              <a:t>Deep Reinforcement Learning</a:t>
+            </a:r>
+            <a:endParaRPr lang="de-DE" sz="1500" dirty="0"/>
+          </a:p>
+          <a:p>
+            <a:pPr marL="514350" indent="-514350">
+              <a:buFont typeface="+mj-lt"/>
+              <a:buAutoNum type="arabicPeriod"/>
+            </a:pPr>
+            <a:endParaRPr lang="de-DE" dirty="0"/>
+          </a:p>
+          <a:p>
+            <a:pPr marL="514350" indent="-514350">
+              <a:buFont typeface="+mj-lt"/>
+              <a:buAutoNum type="arabicPeriod"/>
+            </a:pPr>
+            <a:r>
+              <a:rPr lang="de-DE" dirty="0"/>
+              <a:t>Outlook: </a:t>
+            </a:r>
+            <a:r>
               <a:rPr lang="de-DE" dirty="0" err="1"/>
               <a:t>Advanced</a:t>
             </a:r>
@@ -7129,240 +6651,6 @@
               <a:rPr lang="de-DE" dirty="0"/>
               <a:t> &amp; Emerging Methods</a:t>
             </a:r>
-          </a:p>
-          <a:p>
-            <a:pPr lvl="1"/>
-            <a:r>
-              <a:rPr lang="de-DE" sz="1500" dirty="0"/>
-              <a:t>Learning </a:t>
-            </a:r>
-            <a:r>
-              <a:rPr lang="de-DE" sz="1500" dirty="0" err="1"/>
-              <a:t>with</a:t>
-            </a:r>
-            <a:r>
-              <a:rPr lang="de-DE" sz="1500" dirty="0"/>
-              <a:t> Models and Fixed Data: model-</a:t>
-            </a:r>
-            <a:r>
-              <a:rPr lang="de-DE" sz="1500" dirty="0" err="1"/>
-              <a:t>based</a:t>
-            </a:r>
-            <a:r>
-              <a:rPr lang="de-DE" sz="1500" dirty="0"/>
-              <a:t> RL, offline RL</a:t>
-            </a:r>
-          </a:p>
-          <a:p>
-            <a:pPr lvl="1"/>
-            <a:r>
-              <a:rPr lang="de-DE" sz="1500" dirty="0"/>
-              <a:t>Learning </a:t>
-            </a:r>
-            <a:r>
-              <a:rPr lang="de-DE" sz="1500" dirty="0" err="1"/>
-              <a:t>from</a:t>
-            </a:r>
-            <a:r>
-              <a:rPr lang="de-DE" sz="1500" dirty="0"/>
-              <a:t> </a:t>
-            </a:r>
-            <a:r>
-              <a:rPr lang="de-DE" sz="1500" dirty="0" err="1"/>
-              <a:t>Demonstrations</a:t>
-            </a:r>
-            <a:r>
-              <a:rPr lang="de-DE" sz="1500" dirty="0"/>
-              <a:t> and </a:t>
-            </a:r>
-            <a:r>
-              <a:rPr lang="de-DE" sz="1500" dirty="0" err="1"/>
-              <a:t>Humans</a:t>
-            </a:r>
-            <a:r>
-              <a:rPr lang="de-DE" sz="1500" dirty="0"/>
-              <a:t>: </a:t>
-            </a:r>
-            <a:r>
-              <a:rPr lang="de-DE" sz="1500" dirty="0" err="1"/>
-              <a:t>behavior</a:t>
-            </a:r>
-            <a:r>
-              <a:rPr lang="de-DE" sz="1500" dirty="0"/>
-              <a:t> </a:t>
-            </a:r>
-            <a:r>
-              <a:rPr lang="de-DE" sz="1500" dirty="0" err="1"/>
-              <a:t>cloning</a:t>
-            </a:r>
-            <a:r>
-              <a:rPr lang="de-DE" sz="1500" dirty="0"/>
-              <a:t>, </a:t>
-            </a:r>
-            <a:r>
-              <a:rPr lang="de-DE" sz="1500" dirty="0" err="1"/>
-              <a:t>imitation</a:t>
-            </a:r>
-            <a:r>
-              <a:rPr lang="de-DE" sz="1500" dirty="0"/>
-              <a:t> </a:t>
-            </a:r>
-            <a:r>
-              <a:rPr lang="de-DE" sz="1500" dirty="0" err="1"/>
-              <a:t>learning</a:t>
-            </a:r>
-            <a:r>
-              <a:rPr lang="de-DE" sz="1500" dirty="0"/>
-              <a:t>, RL </a:t>
-            </a:r>
-            <a:r>
-              <a:rPr lang="de-DE" sz="1500" dirty="0" err="1"/>
-              <a:t>from</a:t>
-            </a:r>
-            <a:r>
-              <a:rPr lang="de-DE" sz="1500" dirty="0"/>
-              <a:t> Human Feedback</a:t>
-            </a:r>
-          </a:p>
-          <a:p>
-            <a:pPr lvl="1"/>
-            <a:r>
-              <a:rPr lang="de-DE" sz="1500" dirty="0"/>
-              <a:t>RL </a:t>
-            </a:r>
-            <a:r>
-              <a:rPr lang="de-DE" sz="1500" dirty="0" err="1"/>
-              <a:t>as</a:t>
-            </a:r>
-            <a:r>
-              <a:rPr lang="de-DE" sz="1500" dirty="0"/>
-              <a:t> </a:t>
-            </a:r>
-            <a:r>
-              <a:rPr lang="de-DE" sz="1500" dirty="0" err="1"/>
-              <a:t>Sequence</a:t>
-            </a:r>
-            <a:r>
-              <a:rPr lang="de-DE" sz="1500" dirty="0"/>
-              <a:t> and Generative Modeling: </a:t>
-            </a:r>
-            <a:r>
-              <a:rPr lang="de-DE" sz="1500" dirty="0" err="1"/>
-              <a:t>trajectory</a:t>
-            </a:r>
-            <a:r>
-              <a:rPr lang="de-DE" sz="1500" dirty="0"/>
-              <a:t> </a:t>
-            </a:r>
-            <a:r>
-              <a:rPr lang="de-DE" sz="1500" dirty="0" err="1"/>
-              <a:t>modeling</a:t>
-            </a:r>
-            <a:r>
-              <a:rPr lang="de-DE" sz="1500" dirty="0"/>
-              <a:t>, </a:t>
-            </a:r>
-            <a:r>
-              <a:rPr lang="de-DE" sz="1500" dirty="0" err="1"/>
-              <a:t>Decision</a:t>
-            </a:r>
-            <a:r>
-              <a:rPr lang="de-DE" sz="1500" dirty="0"/>
-              <a:t> Transformer, </a:t>
-            </a:r>
-            <a:r>
-              <a:rPr lang="de-DE" sz="1500" dirty="0" err="1"/>
-              <a:t>diffusion</a:t>
-            </a:r>
-            <a:r>
-              <a:rPr lang="de-DE" sz="1500" dirty="0"/>
-              <a:t> </a:t>
-            </a:r>
-            <a:r>
-              <a:rPr lang="de-DE" sz="1500" dirty="0" err="1"/>
-              <a:t>policies</a:t>
-            </a:r>
-            <a:endParaRPr lang="de-DE" sz="1500" dirty="0"/>
-          </a:p>
-          <a:p>
-            <a:pPr lvl="1"/>
-            <a:r>
-              <a:rPr lang="de-DE" sz="1500" dirty="0" err="1"/>
-              <a:t>Scaling</a:t>
-            </a:r>
-            <a:r>
-              <a:rPr lang="de-DE" sz="1500" dirty="0"/>
-              <a:t> RL </a:t>
-            </a:r>
-            <a:r>
-              <a:rPr lang="de-DE" sz="1500" dirty="0" err="1"/>
-              <a:t>to</a:t>
-            </a:r>
-            <a:r>
-              <a:rPr lang="de-DE" sz="1500" dirty="0"/>
-              <a:t> Real-World Robotics: </a:t>
-            </a:r>
-            <a:r>
-              <a:rPr lang="de-DE" sz="1500" dirty="0" err="1"/>
-              <a:t>embodied</a:t>
-            </a:r>
-            <a:r>
-              <a:rPr lang="de-DE" sz="1500" dirty="0"/>
-              <a:t> RL, </a:t>
-            </a:r>
-            <a:r>
-              <a:rPr lang="de-DE" sz="1500" dirty="0" err="1"/>
-              <a:t>sim</a:t>
-            </a:r>
-            <a:r>
-              <a:rPr lang="de-DE" sz="1500" dirty="0"/>
-              <a:t>-</a:t>
-            </a:r>
-            <a:r>
-              <a:rPr lang="de-DE" sz="1500" dirty="0" err="1"/>
-              <a:t>to</a:t>
-            </a:r>
-            <a:r>
-              <a:rPr lang="de-DE" sz="1500" dirty="0"/>
-              <a:t>-real </a:t>
-            </a:r>
-            <a:r>
-              <a:rPr lang="de-DE" sz="1500" dirty="0" err="1"/>
-              <a:t>gap</a:t>
-            </a:r>
-            <a:r>
-              <a:rPr lang="de-DE" sz="1500" dirty="0"/>
-              <a:t>, </a:t>
-            </a:r>
-            <a:r>
-              <a:rPr lang="de-DE" sz="1500" dirty="0" err="1"/>
-              <a:t>generalist</a:t>
-            </a:r>
-            <a:r>
-              <a:rPr lang="de-DE" sz="1500" dirty="0"/>
-              <a:t> </a:t>
-            </a:r>
-            <a:r>
-              <a:rPr lang="de-DE" sz="1500" dirty="0" err="1"/>
-              <a:t>robot</a:t>
-            </a:r>
-            <a:r>
-              <a:rPr lang="de-DE" sz="1500" dirty="0"/>
-              <a:t> </a:t>
-            </a:r>
-            <a:r>
-              <a:rPr lang="de-DE" sz="1500" dirty="0" err="1"/>
-              <a:t>policies</a:t>
-            </a:r>
-            <a:r>
-              <a:rPr lang="de-DE" sz="1500" dirty="0"/>
-              <a:t>, Vision–Language–Action </a:t>
-            </a:r>
-            <a:r>
-              <a:rPr lang="de-DE" sz="1500" dirty="0" err="1"/>
-              <a:t>models</a:t>
-            </a:r>
-            <a:endParaRPr lang="de-DE" sz="1500" dirty="0"/>
           </a:p>
         </p:txBody>
       </p:sp>

--- a/slides/0_introduction.pptx
+++ b/slides/0_introduction.pptx
@@ -485,7 +485,7 @@
           <a:p>
             <a:fld id="{506E0FD1-891F-4B1E-916D-E9B585160BB8}" type="datetimeFigureOut">
               <a:rPr lang="en-GB" smtClean="0"/>
-              <a:t>22/04/2026</a:t>
+              <a:t>23/04/2026</a:t>
             </a:fld>
             <a:endParaRPr lang="en-GB"/>
           </a:p>
@@ -902,7 +902,7 @@
           <a:p>
             <a:fld id="{D68C3F22-27B2-44E3-9C5F-D08126455F6F}" type="datetime1">
               <a:rPr lang="en-GB" smtClean="0"/>
-              <a:t>22/04/2026</a:t>
+              <a:t>23/04/2026</a:t>
             </a:fld>
             <a:endParaRPr lang="en-GB"/>
           </a:p>
@@ -1102,7 +1102,7 @@
           <a:p>
             <a:fld id="{1CD03846-7BF6-4FB6-A921-FF3379ADBD4C}" type="datetime1">
               <a:rPr lang="en-GB" smtClean="0"/>
-              <a:t>22/04/2026</a:t>
+              <a:t>23/04/2026</a:t>
             </a:fld>
             <a:endParaRPr lang="en-GB"/>
           </a:p>
@@ -1312,7 +1312,7 @@
           <a:p>
             <a:fld id="{99E1B91A-3FD0-4144-9C84-63E9688ED2FE}" type="datetime1">
               <a:rPr lang="en-GB" smtClean="0"/>
-              <a:t>22/04/2026</a:t>
+              <a:t>23/04/2026</a:t>
             </a:fld>
             <a:endParaRPr lang="en-GB"/>
           </a:p>
@@ -1512,7 +1512,7 @@
           <a:p>
             <a:fld id="{5295ED7B-FEAD-4734-819F-93EF4B0EA908}" type="datetime1">
               <a:rPr lang="en-GB" smtClean="0"/>
-              <a:t>22/04/2026</a:t>
+              <a:t>23/04/2026</a:t>
             </a:fld>
             <a:endParaRPr lang="en-GB"/>
           </a:p>
@@ -1788,7 +1788,7 @@
           <a:p>
             <a:fld id="{D2D5D4B4-C926-4B45-8815-1ED8911179A2}" type="datetime1">
               <a:rPr lang="en-GB" smtClean="0"/>
-              <a:t>22/04/2026</a:t>
+              <a:t>23/04/2026</a:t>
             </a:fld>
             <a:endParaRPr lang="en-GB"/>
           </a:p>
@@ -2056,7 +2056,7 @@
           <a:p>
             <a:fld id="{B4C5210A-0E37-4935-93AF-69F21A5F712F}" type="datetime1">
               <a:rPr lang="en-GB" smtClean="0"/>
-              <a:t>22/04/2026</a:t>
+              <a:t>23/04/2026</a:t>
             </a:fld>
             <a:endParaRPr lang="en-GB"/>
           </a:p>
@@ -2471,7 +2471,7 @@
           <a:p>
             <a:fld id="{3D3A6B2F-436C-4691-80E8-9C890E000E9D}" type="datetime1">
               <a:rPr lang="en-GB" smtClean="0"/>
-              <a:t>22/04/2026</a:t>
+              <a:t>23/04/2026</a:t>
             </a:fld>
             <a:endParaRPr lang="en-GB"/>
           </a:p>
@@ -2613,7 +2613,7 @@
           <a:p>
             <a:fld id="{84385F4C-D74B-496F-8D21-97E3549C783B}" type="datetime1">
               <a:rPr lang="en-GB" smtClean="0"/>
-              <a:t>22/04/2026</a:t>
+              <a:t>23/04/2026</a:t>
             </a:fld>
             <a:endParaRPr lang="en-GB"/>
           </a:p>
@@ -2726,7 +2726,7 @@
           <a:p>
             <a:fld id="{0CBDCB32-C241-4703-A832-4EB47BD54E83}" type="datetime1">
               <a:rPr lang="en-GB" smtClean="0"/>
-              <a:t>22/04/2026</a:t>
+              <a:t>23/04/2026</a:t>
             </a:fld>
             <a:endParaRPr lang="en-GB"/>
           </a:p>
@@ -3039,7 +3039,7 @@
           <a:p>
             <a:fld id="{85C150FF-BE95-4D25-A16A-E368A81CBF24}" type="datetime1">
               <a:rPr lang="en-GB" smtClean="0"/>
-              <a:t>22/04/2026</a:t>
+              <a:t>23/04/2026</a:t>
             </a:fld>
             <a:endParaRPr lang="en-GB"/>
           </a:p>
@@ -3328,7 +3328,7 @@
           <a:p>
             <a:fld id="{F3C5DB4B-B349-43C9-A424-BADA723AD9F1}" type="datetime1">
               <a:rPr lang="en-GB" smtClean="0"/>
-              <a:t>22/04/2026</a:t>
+              <a:t>23/04/2026</a:t>
             </a:fld>
             <a:endParaRPr lang="en-GB"/>
           </a:p>
@@ -3571,7 +3571,7 @@
           <a:p>
             <a:fld id="{12632426-0A0C-405F-A3D0-2D11AA44702A}" type="datetime1">
               <a:rPr lang="en-GB" smtClean="0"/>
-              <a:t>22/04/2026</a:t>
+              <a:t>23/04/2026</a:t>
             </a:fld>
             <a:endParaRPr lang="en-GB"/>
           </a:p>
@@ -6533,15 +6533,10 @@
             <p:ph idx="1"/>
           </p:nvPr>
         </p:nvSpPr>
-        <p:spPr>
-          <a:xfrm>
-            <a:off x="419099" y="1690688"/>
-            <a:ext cx="11353801" cy="4665662"/>
-          </a:xfrm>
-        </p:spPr>
+        <p:spPr/>
         <p:txBody>
           <a:bodyPr>
-            <a:normAutofit/>
+            <a:normAutofit lnSpcReduction="10000"/>
           </a:bodyPr>
           <a:lstStyle/>
           <a:p>
@@ -6606,8 +6601,13 @@
             </a:r>
             <a:r>
               <a:rPr lang="de-DE" dirty="0"/>
-              <a:t> Learning</a:t>
-            </a:r>
+              <a:t> Learning </a:t>
+            </a:r>
+            <a:r>
+              <a:rPr lang="de-DE" dirty="0" err="1"/>
+              <a:t>Overview</a:t>
+            </a:r>
+            <a:endParaRPr lang="de-DE" dirty="0"/>
           </a:p>
           <a:p>
             <a:pPr marL="514350" indent="-514350">
